--- a/lectures/Session03-OpenSource.pptx
+++ b/lectures/Session03-OpenSource.pptx
@@ -514,7 +514,7 @@
           <a:p>
             <a:r>
               <a:rPr lang="en-US" dirty="0"/>
-              <a:t>Monday teaching session. Problem-finding continues on their own time; today is the craft of building in the open.</a:t>
+              <a:t>A Monday teaching session — more lecture-and-discussion than workshop. Frame it: problem-finding continues on their own time (keep that journal going), and today is the CRAFT of building in the open — licensing and governance. These are the founder decisions that turn code into a project others can legally use and actually join. ~1 min.</a:t>
             </a:r>
             <a:endParaRPr lang="en-US" dirty="0"/>
           </a:p>
@@ -602,7 +602,7 @@
           <a:p>
             <a:r>
               <a:rPr lang="en-US" dirty="0"/>
-              <a:t/>
+              <a:t>The six calls they'll actually make as maintainer: visibility, code of conduct, contribution process, maintainer expectations, communication channel, and decision-making (solo call vs. small council). Stress there's no single right answer — the point is to decide deliberately rather than by default. Land the banner: leading as sponsor means setting these norms and stewarding the project — building the place others come to build. ~3 min.</a:t>
             </a:r>
             <a:endParaRPr lang="en-US" dirty="0"/>
           </a:p>
@@ -690,7 +690,7 @@
           <a:p>
             <a:r>
               <a:rPr lang="en-US" dirty="0"/>
-              <a:t/>
+              <a:t>The main activity. In small groups, take one member's candidate idea and decide (a) a license and (b) three governance choices, with reasoning, then share one of each with the room. Offer the alternative for groups who prefer it: audit a real repo's governance against the checklist — what would you keep or change? Circulate and push for the WHY behind every call. ~12-15 min.</a:t>
             </a:r>
             <a:endParaRPr lang="en-US" dirty="0"/>
           </a:p>
@@ -778,7 +778,7 @@
           <a:p>
             <a:r>
               <a:rPr lang="en-US" dirty="0"/>
-              <a:t/>
+              <a:t>Walk through the License/OSS short response — about one page: pick and name a license for the project they're imagining, explain in plain terms what it lets others do and not do and why it fits their goals, and name one governance choice they'd make and why. Point them to the cheat sheet and choosealicense.com. Confirm the due date aloud so it matches the LMS. ~2 min.</a:t>
             </a:r>
             <a:endParaRPr lang="en-US" dirty="0"/>
           </a:p>
@@ -866,7 +866,7 @@
           <a:p>
             <a:r>
               <a:rPr lang="en-US" dirty="0"/>
-              <a:t>Preview Session 4 (Wed): the discovery workshop. Assign its reading. The discovery assignment kicks off then.</a:t>
+              <a:t>Close on the through-line: building in the open is how a project becomes something others can join. Assign the Session 4 discovery readings (see the Session 4 page), the License/OSS short response, and keep feeding the journal. Preview Wednesday — the discovery workshop, talking to real users, where the discovery assignment kicks off. ~1-2 min.</a:t>
             </a:r>
             <a:endParaRPr lang="en-US" dirty="0"/>
           </a:p>
@@ -954,7 +954,7 @@
           <a:p>
             <a:r>
               <a:rPr lang="en-US" dirty="0"/>
-              <a:t/>
+              <a:t>Quick bridge from Session 2: they generated a big pool of candidate problems; remind them to keep feeding the journal for range across three Idea Briefs. Then set today's three-part agenda plainly — why we build in the open, how licenses actually work, and the governance a founder sets. Keep it to a minute or two. ~2 min.</a:t>
             </a:r>
             <a:endParaRPr lang="en-US" dirty="0"/>
           </a:p>
@@ -1042,7 +1042,7 @@
           <a:p>
             <a:r>
               <a:rPr lang="en-US" dirty="0"/>
-              <a:t/>
+              <a:t>Draw the benefits out of the room where you can: contributors, feedback and trust ("many eyes"), reuse and reach, and longevity plus a public portfolio. Then use the navy discussion card to keep it honest — what's actually scary about building in public, whether "given enough eyeballs, all bugs are shallow" holds up, and the key founder question: why would anyone contribute to YOUR project? Let them wrestle with that last one. ~4-5 min.</a:t>
             </a:r>
             <a:endParaRPr lang="en-US" dirty="0"/>
           </a:p>
@@ -1130,7 +1130,7 @@
           <a:p>
             <a:r>
               <a:rPr lang="en-US" dirty="0"/>
-              <a:t/>
+              <a:t>The single most important takeaway of the day, so state it flatly: no license means all rights reserved; even public code on GitHub can't legally be reused or modified until you add one. Many students believe "public equals free to use" — correct that misconception directly. Then the two families: permissive (MIT, Apache, BSD — do almost anything, keep my notice — maximizes adoption) versus copyleft (GPL, AGPL — derivatives stay open — keeps the ecosystem open). ~3-4 min.</a:t>
             </a:r>
             <a:endParaRPr lang="en-US" dirty="0"/>
           </a:p>
@@ -1218,7 +1218,7 @@
           <a:p>
             <a:r>
               <a:rPr lang="en-US" dirty="0"/>
-              <a:t/>
+              <a:t>Teach them to READ any license instead of memorizing them: Permissions (what you may do), Conditions (what you must do), Limitations (what's not granted). This is exactly how choosealicense.com lays out every license, so once they know the three columns they can evaluate anything. Walk one license across the three columns as a worked example. ~3 min.</a:t>
             </a:r>
             <a:endParaRPr lang="en-US" dirty="0"/>
           </a:p>
@@ -1306,7 +1306,7 @@
           <a:p>
             <a:r>
               <a:rPr lang="en-US" dirty="0"/>
-              <a:t>Patent grant column: code carries copyright AND possibly patents. MIT grants copyright but is SILENT on patents, so a contributor could later sue users over a patent on the code they gave you. Apache-2.0 / GPL-3.0 / AGPL-3.0 include an EXPLICIT patent grant (each contributor licenses the patents needed to use their contribution); Apache also adds patent retaliation (sue the project over a patent and your license ends). MIT 'No' = no explicit grant (legally murky; rarely matters for small projects). Practical takeaway: want enterprise/company adoption or to shield your users? Apache-2.0 is a plus. Small personal project? MIT is fine. General background, not legal advice.</a:t>
+              <a:t>Compare the four they'll actually consider: MIT, Apache-2.0, GPL-3.0, AGPL-3.0. Explain the patent-grant column carefully — code carries copyright AND possibly patents; MIT grants copyright but is SILENT on patents, so a contributor could later sue users over a patent on the code they contributed. Apache-2.0, GPL-3.0, and AGPL-3.0 include an explicit patent grant (each contributor licenses the patents needed to use their contribution), and Apache adds patent retaliation (sue the project over a patent and your license ends). Practical takeaway: want enterprise adoption or to shield your users? Apache-2.0 is a plus; a small personal project? MIT is fine. This is general background, not legal advice — point them to the full cheat sheet. ~4 min.</a:t>
             </a:r>
             <a:endParaRPr lang="en-US" dirty="0"/>
           </a:p>
@@ -1394,7 +1394,7 @@
           <a:p>
             <a:r>
               <a:rPr lang="en-US" dirty="0"/>
-              <a:t>Primes the License/OSS short response. Take 1-2 aloud.</a:t>
+              <a:t>A quick three-minute individual exercise — open choosealicense.com and, for their most promising candidate idea, jot down the license, the why (adoption vs. keep-it-open), and one requirement it imposes. Then a fast neighbor turn-and-talk: "what did you pick, and why?" Take one or two aloud. Tell them this primes the License/OSS short response. ~4-5 min.</a:t>
             </a:r>
             <a:endParaRPr lang="en-US" dirty="0"/>
           </a:p>
@@ -1482,7 +1482,7 @@
           <a:p>
             <a:r>
               <a:rPr lang="en-US" dirty="0"/>
-              <a:t/>
+              <a:t>Define governance plainly: the rules and expectations that let strangers contribute safely — the license, the code of conduct, the contribution process, and who decides. Without it, even great code stays a solo repo. Use the contributor's-eye view to make it visceral: a would-be helper asks "do I know how to contribute? what's expected of me? am I even allowed to use this?" — good governance answers all three before they have to ask. ~3 min.</a:t>
             </a:r>
             <a:endParaRPr lang="en-US" dirty="0"/>
           </a:p>
@@ -1570,7 +1570,7 @@
           <a:p>
             <a:r>
               <a:rPr lang="en-US" dirty="0"/>
-              <a:t/>
+              <a:t>Put the two side by side. Strong: a README that onboards plus how-to-contribute, LICENSE/CONTRIBUTING/CODE_OF_CONDUCT, issue and PR templates, labeled good-first-issues and a roadmap, responsive maintainers. Early-stage: just code and a bare README, no license (not reusable), no CONTRIBUTING (newcomers are lost), no code of conduct or templates, stale issues. Frame the right column as "early-stage," not "bad" — it's where everyone starts, and closing that gap is what the course is about. ~3 min.</a:t>
             </a:r>
             <a:endParaRPr lang="en-US" dirty="0"/>
           </a:p>

--- a/lectures/Session03-OpenSource.pptx
+++ b/lectures/Session03-OpenSource.pptx
@@ -778,7 +778,7 @@
           <a:p>
             <a:r>
               <a:rPr lang="en-US" dirty="0"/>
-              <a:t>Walk through the License/OSS short response — about one page: pick and name a license for the project they're imagining, explain in plain terms what it lets others do and not do and why it fits their goals, and name one governance choice they'd make and why. Point them to the cheat sheet and choosealicense.com. Confirm the due date aloud so it matches the LMS. ~2 min.</a:t>
+              <a:t>Walk through the License/OSS short response — about one page: pick and name a license for the project they're imagining, explain in plain terms what it lets others do and not do and why it fits their goals, and name one governance choice they'd make and why. Point them to the cheat sheet and choosealicense.com. Confirm the due date aloud (Mon, Sep 21) so it matches the LMS. ~2 min.</a:t>
             </a:r>
             <a:endParaRPr lang="en-US" dirty="0"/>
           </a:p>
@@ -866,7 +866,7 @@
           <a:p>
             <a:r>
               <a:rPr lang="en-US" dirty="0"/>
-              <a:t>Close on the through-line: building in the open is how a project becomes something others can join. Assign the Session 4 discovery readings (see the Session 4 page), the License/OSS short response, and keep feeding the journal. Preview Wednesday — the discovery workshop, talking to real users, where the discovery assignment kicks off. ~1-2 min.</a:t>
+              <a:t>Close on the through-line: building in the open is how a project becomes something others can join. Before Wednesday's discovery workshop: the Session 4 readings and keep feeding the journal. The License/OSS short response is due Mon, Sep 21 (Week 3) — say the date aloud so it matches the LMS. Preview Wednesday — talking to real users, where the discovery assignment kicks off. ~1-2 min.</a:t>
             </a:r>
             <a:endParaRPr lang="en-US" dirty="0"/>
           </a:p>
@@ -4565,7 +4565,7 @@
                 <a:ea typeface="Calibri" pitchFamily="34" charset="-122"/>
                 <a:cs typeface="Calibri" pitchFamily="34" charset="-120"/>
               </a:rPr>
-              <a:t>BEFORE WEDNESDAY, SEP 16</a:t>
+              <a:t>BEFORE NEXT CLASS — WED, SEP 16</a:t>
             </a:r>
             <a:endParaRPr lang="en-US" sz="1400" dirty="0"/>
           </a:p>
@@ -4629,7 +4629,7 @@
                 <a:ea typeface="Calibri" pitchFamily="34" charset="-122"/>
                 <a:cs typeface="Calibri" pitchFamily="34" charset="-120"/>
               </a:rPr>
-              <a:t>Write your License / OSS short response</a:t>
+              <a:t>Keep feeding your idea journal — next up: talking to real users</a:t>
             </a:r>
             <a:endParaRPr lang="en-US" sz="1650" dirty="0"/>
           </a:p>
@@ -4647,7 +4647,7 @@
                 <a:ea typeface="Calibri" pitchFamily="34" charset="-122"/>
                 <a:cs typeface="Calibri" pitchFamily="34" charset="-120"/>
               </a:rPr>
-              <a:t>Keep feeding your idea journal — next up: talking to real users</a:t>
+              <a:t>Write your License / OSS short response — due Mon, Sep 21</a:t>
             </a:r>
             <a:endParaRPr lang="en-US" sz="1650" dirty="0"/>
           </a:p>
